--- a/classes/parte-9-forense-digital-y-respuesta-a-incidentes/219-ejercicios-de-mesa-tabletop/clase-219-presentacion.pptx
+++ b/classes/parte-9-forense-digital-y-respuesta-a-incidentes/219-ejercicios-de-mesa-tabletop/clase-219-presentacion.pptx
@@ -17,6 +17,11 @@
     <p:sldId id="265" r:id="rId16"/>
     <p:sldId id="266" r:id="rId17"/>
     <p:sldId id="267" r:id="rId18"/>
+    <p:sldId id="268" r:id="rId19"/>
+    <p:sldId id="269" r:id="rId20"/>
+    <p:sldId id="270" r:id="rId21"/>
+    <p:sldId id="271" r:id="rId22"/>
+    <p:sldId id="272" r:id="rId23"/>
   </p:sldIdLst>
   <p:sldSz cx="9144000" cy="6858000" type="screen4x3"/>
   <p:notesSz cx="6858000" cy="9144000"/>
@@ -3198,7 +3203,7 @@
                   <a:srgbClr val="0B3D2E"/>
                 </a:solidFill>
               </a:rPr>
-              <a:t>⚠️ Errores comunes</a:t>
+              <a:t>🧰 Herramientas y preparación</a:t>
             </a:r>
           </a:p>
         </p:txBody>
@@ -3236,67 +3241,52 @@
                   <a:srgbClr val="22282E"/>
                 </a:solidFill>
               </a:rPr>
-              <a:t>•  El ejercicio se estanca — Faltan injects o facilitación. Prepara MSEL y lanza eventos a tiempo.</a:t>
-            </a:r>
-          </a:p>
-          <a:p>
-            <a:pPr>
-              <a:spcAft>
-                <a:spcPts val="600"/>
-              </a:spcAft>
-            </a:pPr>
-            <a:r>
-              <a:rPr sz="1500">
-                <a:solidFill>
-                  <a:srgbClr val="22282E"/>
-                </a:solidFill>
-              </a:rPr>
-              <a:t>•  Se convierte en clase teórica — El facilitador resuelve por el equipo. Deja que decidan ellos.</a:t>
-            </a:r>
-          </a:p>
-          <a:p>
-            <a:pPr>
-              <a:spcAft>
-                <a:spcPts val="600"/>
-              </a:spcAft>
-            </a:pPr>
-            <a:r>
-              <a:rPr sz="1500">
-                <a:solidFill>
-                  <a:srgbClr val="22282E"/>
-                </a:solidFill>
-              </a:rPr>
-              <a:t>•  Escenario irreal — No aplica al contexto. Diseña sobre amenazas plausibles para la organización.</a:t>
-            </a:r>
-          </a:p>
-          <a:p>
-            <a:pPr>
-              <a:spcAft>
-                <a:spcPts val="600"/>
-              </a:spcAft>
-            </a:pPr>
-            <a:r>
-              <a:rPr sz="1500">
-                <a:solidFill>
-                  <a:srgbClr val="22282E"/>
-                </a:solidFill>
-              </a:rPr>
-              <a:t>•  Sin conclusiones accionables — No hubo informe. Cierra con hotwash y acciones asignadas.</a:t>
-            </a:r>
-          </a:p>
-          <a:p>
-            <a:pPr>
-              <a:spcAft>
-                <a:spcPts val="600"/>
-              </a:spcAft>
-            </a:pPr>
-            <a:r>
-              <a:rPr sz="1500">
-                <a:solidFill>
-                  <a:srgbClr val="22282E"/>
-                </a:solidFill>
-              </a:rPr>
-              <a:t>•  Solo participa TI — Falta convocar a legal, comunicación y dirección. Inclúyelos.</a:t>
+              <a:t>•  Diseño: plantilla de escenario, MSEL con injects y tiempos, objetivos medibles.</a:t>
+            </a:r>
+          </a:p>
+          <a:p>
+            <a:pPr>
+              <a:spcAft>
+                <a:spcPts val="600"/>
+              </a:spcAft>
+            </a:pPr>
+            <a:r>
+              <a:rPr sz="1500">
+                <a:solidFill>
+                  <a:srgbClr val="22282E"/>
+                </a:solidFill>
+              </a:rPr>
+              <a:t>•  Facilitación: sala (física o virtual), reloj, y un observador que tome notas.</a:t>
+            </a:r>
+          </a:p>
+          <a:p>
+            <a:pPr>
+              <a:spcAft>
+                <a:spcPts val="600"/>
+              </a:spcAft>
+            </a:pPr>
+            <a:r>
+              <a:rPr sz="1500">
+                <a:solidFill>
+                  <a:srgbClr val="22282E"/>
+                </a:solidFill>
+              </a:rPr>
+              <a:t>•  Insumos: los playbooks (clase 215) que se quieren poner a prueba.</a:t>
+            </a:r>
+          </a:p>
+          <a:p>
+            <a:pPr>
+              <a:spcAft>
+                <a:spcPts val="600"/>
+              </a:spcAft>
+            </a:pPr>
+            <a:r>
+              <a:rPr sz="1500">
+                <a:solidFill>
+                  <a:srgbClr val="22282E"/>
+                </a:solidFill>
+              </a:rPr>
+              <a:t>•  Ejercicio aplicado: no requiere entorno técnico; es organizativo.</a:t>
             </a:r>
           </a:p>
         </p:txBody>
@@ -3347,7 +3337,7 @@
                   <a:srgbClr val="0B3D2E"/>
                 </a:solidFill>
               </a:rPr>
-              <a:t>❓ Preguntas frecuentes</a:t>
+              <a:t>🧪 Laboratorio guiado</a:t>
             </a:r>
           </a:p>
         </p:txBody>
@@ -3385,97 +3375,97 @@
                   <a:srgbClr val="22282E"/>
                 </a:solidFill>
               </a:rPr>
-              <a:t>•  ❓ ¿Tabletop o simulacro real?</a:t>
-            </a:r>
-          </a:p>
-          <a:p>
-            <a:pPr>
-              <a:spcAft>
-                <a:spcPts val="600"/>
-              </a:spcAft>
-            </a:pPr>
-            <a:r>
-              <a:rPr sz="1500">
-                <a:solidFill>
-                  <a:srgbClr val="22282E"/>
-                </a:solidFill>
-              </a:rPr>
-              <a:t>•  Tabletop primero: barato, sin riesgo, ideal para validar procesos y roles. Los funcionales y full-scale se hacen cuando el proceso ya madura.</a:t>
-            </a:r>
-          </a:p>
-          <a:p>
-            <a:pPr>
-              <a:spcAft>
-                <a:spcPts val="600"/>
-              </a:spcAft>
-            </a:pPr>
-            <a:r>
-              <a:rPr sz="1500">
-                <a:solidFill>
-                  <a:srgbClr val="22282E"/>
-                </a:solidFill>
-              </a:rPr>
-              <a:t>•  ❓ ¿Con qué frecuencia se hacen?</a:t>
-            </a:r>
-          </a:p>
-          <a:p>
-            <a:pPr>
-              <a:spcAft>
-                <a:spcPts val="600"/>
-              </a:spcAft>
-            </a:pPr>
-            <a:r>
-              <a:rPr sz="1500">
-                <a:solidFill>
-                  <a:srgbClr val="22282E"/>
-                </a:solidFill>
-              </a:rPr>
-              <a:t>•  Al menos anual, y tras cambios grandes (nuevos sistemas, reorganización) o incidentes relevantes.</a:t>
-            </a:r>
-          </a:p>
-          <a:p>
-            <a:pPr>
-              <a:spcAft>
-                <a:spcPts val="600"/>
-              </a:spcAft>
-            </a:pPr>
-            <a:r>
-              <a:rPr sz="1500">
-                <a:solidFill>
-                  <a:srgbClr val="22282E"/>
-                </a:solidFill>
-              </a:rPr>
-              <a:t>•  ❓ ¿Quién debe participar?</a:t>
-            </a:r>
-          </a:p>
-          <a:p>
-            <a:pPr>
-              <a:spcAft>
-                <a:spcPts val="600"/>
-              </a:spcAft>
-            </a:pPr>
-            <a:r>
-              <a:rPr sz="1500">
-                <a:solidFill>
-                  <a:srgbClr val="22282E"/>
-                </a:solidFill>
-              </a:rPr>
-              <a:t>•  No solo TI/seguridad: incluye legal, comunicación, RR. HH. y dirección, según el escenario.</a:t>
-            </a:r>
-          </a:p>
-          <a:p>
-            <a:pPr>
-              <a:spcAft>
-                <a:spcPts val="600"/>
-              </a:spcAft>
-            </a:pPr>
-            <a:r>
-              <a:rPr sz="1500">
-                <a:solidFill>
-                  <a:srgbClr val="22282E"/>
-                </a:solidFill>
-              </a:rPr>
-              <a:t>•  ❓ ¿Qué es la MSEL?</a:t>
+              <a:t>•  Define objetivos medibles: p. ej. "validar el playbook de ransomware y los criterios de escalado".</a:t>
+            </a:r>
+          </a:p>
+          <a:p>
+            <a:pPr>
+              <a:spcAft>
+                <a:spcPts val="600"/>
+              </a:spcAft>
+            </a:pPr>
+            <a:r>
+              <a:rPr sz="1500">
+                <a:solidFill>
+                  <a:srgbClr val="22282E"/>
+                </a:solidFill>
+              </a:rPr>
+              <a:t>•  Elige un escenario realista para tu contexto (ransomware que cifra un servidor de archivos y exige rescate).</a:t>
+            </a:r>
+          </a:p>
+          <a:p>
+            <a:pPr>
+              <a:spcAft>
+                <a:spcPts val="600"/>
+              </a:spcAft>
+            </a:pPr>
+            <a:r>
+              <a:rPr sz="1500">
+                <a:solidFill>
+                  <a:srgbClr val="22282E"/>
+                </a:solidFill>
+              </a:rPr>
+              <a:t>•  Redacta la MSEL con injects progresivos y sus tiempos. Ejemplo de injects:</a:t>
+            </a:r>
+          </a:p>
+          <a:p>
+            <a:pPr>
+              <a:spcAft>
+                <a:spcPts val="600"/>
+              </a:spcAft>
+            </a:pPr>
+            <a:r>
+              <a:rPr sz="1500">
+                <a:solidFill>
+                  <a:srgbClr val="22282E"/>
+                </a:solidFill>
+              </a:rPr>
+              <a:t>•  T+0: el EDR alerta de cifrado masivo en un servidor.</a:t>
+            </a:r>
+          </a:p>
+          <a:p>
+            <a:pPr>
+              <a:spcAft>
+                <a:spcPts val="600"/>
+              </a:spcAft>
+            </a:pPr>
+            <a:r>
+              <a:rPr sz="1500">
+                <a:solidFill>
+                  <a:srgbClr val="22282E"/>
+                </a:solidFill>
+              </a:rPr>
+              <a:t>•  T+15: usuarios reportan que no acceden a archivos.</a:t>
+            </a:r>
+          </a:p>
+          <a:p>
+            <a:pPr>
+              <a:spcAft>
+                <a:spcPts val="600"/>
+              </a:spcAft>
+            </a:pPr>
+            <a:r>
+              <a:rPr sz="1500">
+                <a:solidFill>
+                  <a:srgbClr val="22282E"/>
+                </a:solidFill>
+              </a:rPr>
+              <a:t>•  T+30: aparece una nota de rescate; el atacante amenaza con filtrar datos.</a:t>
+            </a:r>
+          </a:p>
+          <a:p>
+            <a:pPr>
+              <a:spcAft>
+                <a:spcPts val="600"/>
+              </a:spcAft>
+            </a:pPr>
+            <a:r>
+              <a:rPr sz="1500">
+                <a:solidFill>
+                  <a:srgbClr val="22282E"/>
+                </a:solidFill>
+              </a:rPr>
+              <a:t>•  T+45: un periodista contacta pidiendo comentarios.</a:t>
             </a:r>
           </a:p>
         </p:txBody>
@@ -3526,7 +3516,7 @@
                   <a:srgbClr val="0B3D2E"/>
                 </a:solidFill>
               </a:rPr>
-              <a:t>🔗 Referencias</a:t>
+              <a:t>✍️ Ejercicios</a:t>
             </a:r>
           </a:p>
         </p:txBody>
@@ -3564,56 +3554,727 @@
                   <a:srgbClr val="22282E"/>
                 </a:solidFill>
               </a:rPr>
-              <a:t>•  NIST SP 800-84 — Test, Training, and Exercise Programs: &lt;https://csrc.nist.gov/publications/detail/sp/800-84/final&gt;</a:t>
-            </a:r>
-          </a:p>
-          <a:p>
-            <a:pPr>
-              <a:spcAft>
-                <a:spcPts val="600"/>
-              </a:spcAft>
-            </a:pPr>
-            <a:r>
-              <a:rPr sz="1500">
-                <a:solidFill>
-                  <a:srgbClr val="22282E"/>
-                </a:solidFill>
-              </a:rPr>
-              <a:t>•  CISA — Tabletop Exercise Packages (CTEP): &lt;https://www.cisa.gov/resources-tools/services/cisa-tabletop-exercise-packages&gt;</a:t>
-            </a:r>
-          </a:p>
-          <a:p>
-            <a:pPr>
-              <a:spcAft>
-                <a:spcPts val="600"/>
-              </a:spcAft>
-            </a:pPr>
-            <a:r>
-              <a:rPr sz="1500">
-                <a:solidFill>
-                  <a:srgbClr val="22282E"/>
-                </a:solidFill>
-              </a:rPr>
-              <a:t>•  SANS — Incident Response resources: &lt;https://www.sans.org/&gt;</a:t>
-            </a:r>
-          </a:p>
-          <a:p>
-            <a:pPr>
-              <a:spcAft>
-                <a:spcPts val="600"/>
-              </a:spcAft>
-            </a:pPr>
-            <a:r>
-              <a:rPr sz="1500">
-                <a:solidFill>
-                  <a:srgbClr val="22282E"/>
-                </a:solidFill>
-              </a:rPr>
-              <a:t>•  NIST SP 800-61 Rev. 2: &lt;https://csrc.nist.gov/publications/detail/sp/800-61/rev-2/final&gt;</a:t>
-            </a:r>
-          </a:p>
-        </p:txBody>
-      </p:sp>
+              <a:t>•  Define tres objetivos medibles para un tabletop.</a:t>
+            </a:r>
+          </a:p>
+          <a:p>
+            <a:pPr>
+              <a:spcAft>
+                <a:spcPts val="600"/>
+              </a:spcAft>
+            </a:pPr>
+            <a:r>
+              <a:rPr sz="1500">
+                <a:solidFill>
+                  <a:srgbClr val="22282E"/>
+                </a:solidFill>
+              </a:rPr>
+              <a:t>•  Escribe una MSEL con cinco injects y sus tiempos.</a:t>
+            </a:r>
+          </a:p>
+          <a:p>
+            <a:pPr>
+              <a:spcAft>
+                <a:spcPts val="600"/>
+              </a:spcAft>
+            </a:pPr>
+            <a:r>
+              <a:rPr sz="1500">
+                <a:solidFill>
+                  <a:srgbClr val="22282E"/>
+                </a:solidFill>
+              </a:rPr>
+              <a:t>•  Diseña un escenario de brecha de datos con inject de prensa.</a:t>
+            </a:r>
+          </a:p>
+          <a:p>
+            <a:pPr>
+              <a:spcAft>
+                <a:spcPts val="600"/>
+              </a:spcAft>
+            </a:pPr>
+            <a:r>
+              <a:rPr sz="1500">
+                <a:solidFill>
+                  <a:srgbClr val="22282E"/>
+                </a:solidFill>
+              </a:rPr>
+              <a:t>•  Redacta las preguntas de decisión para dirección y legal.</a:t>
+            </a:r>
+          </a:p>
+          <a:p>
+            <a:pPr>
+              <a:spcAft>
+                <a:spcPts val="600"/>
+              </a:spcAft>
+            </a:pPr>
+            <a:r>
+              <a:rPr sz="1500">
+                <a:solidFill>
+                  <a:srgbClr val="22282E"/>
+                </a:solidFill>
+              </a:rPr>
+              <a:t>•  Crea una rúbrica para evaluar la respuesta del equipo.</a:t>
+            </a:r>
+          </a:p>
+          <a:p>
+            <a:pPr>
+              <a:spcAft>
+                <a:spcPts val="600"/>
+              </a:spcAft>
+            </a:pPr>
+            <a:r>
+              <a:rPr sz="1500">
+                <a:solidFill>
+                  <a:srgbClr val="22282E"/>
+                </a:solidFill>
+              </a:rPr>
+              <a:t>•  Escribe el guion de un hotwash de 15 minutos.</a:t>
+            </a:r>
+          </a:p>
+        </p:txBody>
+      </p:sp>
+    </p:spTree>
+  </p:cSld>
+  <p:clrMapOvr>
+    <a:masterClrMapping/>
+  </p:clrMapOvr>
+</p:sld>
+</file>
+
+<file path=ppt/slides/slide13.xml><?xml version="1.0" encoding="utf-8"?>
+<p:sld xmlns:a="http://schemas.openxmlformats.org/drawingml/2006/main" xmlns:p="http://schemas.openxmlformats.org/presentationml/2006/main" xmlns:r="http://schemas.openxmlformats.org/officeDocument/2006/relationships">
+  <p:cSld>
+    <p:spTree>
+      <p:nvGrpSpPr>
+        <p:cNvPr id="1" name=""/>
+        <p:cNvGrpSpPr/>
+        <p:nvPr/>
+      </p:nvGrpSpPr>
+      <p:grpSpPr/>
+      <p:sp>
+        <p:nvSpPr>
+          <p:cNvPr id="2" name="TextBox 1"/>
+          <p:cNvSpPr txBox="1"/>
+          <p:nvPr/>
+        </p:nvSpPr>
+        <p:spPr>
+          <a:xfrm>
+            <a:off x="457200" y="320040"/>
+            <a:ext cx="8229600" cy="822960"/>
+          </a:xfrm>
+          <a:prstGeom prst="rect">
+            <a:avLst/>
+          </a:prstGeom>
+          <a:noFill/>
+        </p:spPr>
+        <p:txBody>
+          <a:bodyPr wrap="square">
+            <a:spAutoFit/>
+          </a:bodyPr>
+          <a:lstStyle/>
+          <a:p>
+            <a:r>
+              <a:rPr sz="2600" b="1">
+                <a:solidFill>
+                  <a:srgbClr val="0B3D2E"/>
+                </a:solidFill>
+              </a:rPr>
+              <a:t>📝 Reto verificable</a:t>
+            </a:r>
+          </a:p>
+        </p:txBody>
+      </p:sp>
+      <p:sp>
+        <p:nvSpPr>
+          <p:cNvPr id="3" name="TextBox 2"/>
+          <p:cNvSpPr txBox="1"/>
+          <p:nvPr/>
+        </p:nvSpPr>
+        <p:spPr>
+          <a:xfrm>
+            <a:off x="457200" y="1280160"/>
+            <a:ext cx="8229600" cy="4937760"/>
+          </a:xfrm>
+          <a:prstGeom prst="rect">
+            <a:avLst/>
+          </a:prstGeom>
+          <a:noFill/>
+        </p:spPr>
+        <p:txBody>
+          <a:bodyPr wrap="square">
+            <a:spAutoFit/>
+          </a:bodyPr>
+          <a:lstStyle/>
+          <a:p>
+            <a:pPr>
+              <a:spcAft>
+                <a:spcPts val="600"/>
+              </a:spcAft>
+            </a:pPr>
+            <a:r>
+              <a:rPr sz="1500">
+                <a:solidFill>
+                  <a:srgbClr val="22282E"/>
+                </a:solidFill>
+              </a:rPr>
+              <a:t>•  Diseña un ejercicio tabletop completo (objetivos, escenario, MSEL con al menos cinco injects, roles y rúbrica de evaluación) sobre un incidente relevante, listo para ejecutarse con un equipo real.</a:t>
+            </a:r>
+          </a:p>
+          <a:p>
+            <a:pPr>
+              <a:spcAft>
+                <a:spcPts val="600"/>
+              </a:spcAft>
+            </a:pPr>
+            <a:r>
+              <a:rPr sz="1500">
+                <a:solidFill>
+                  <a:srgbClr val="22282E"/>
+                </a:solidFill>
+              </a:rPr>
+              <a:t>•  Criterio de aceptación: el paquete permite a otro facilitador correr el ejercicio sin ayuda; incluye objetivos medibles, MSEL cronometrada con cinco injects, roles claros, puntos de decisión y una…</a:t>
+            </a:r>
+          </a:p>
+        </p:txBody>
+      </p:sp>
+    </p:spTree>
+  </p:cSld>
+  <p:clrMapOvr>
+    <a:masterClrMapping/>
+  </p:clrMapOvr>
+</p:sld>
+</file>
+
+<file path=ppt/slides/slide14.xml><?xml version="1.0" encoding="utf-8"?>
+<p:sld xmlns:a="http://schemas.openxmlformats.org/drawingml/2006/main" xmlns:p="http://schemas.openxmlformats.org/presentationml/2006/main" xmlns:r="http://schemas.openxmlformats.org/officeDocument/2006/relationships">
+  <p:cSld>
+    <p:spTree>
+      <p:nvGrpSpPr>
+        <p:cNvPr id="1" name=""/>
+        <p:cNvGrpSpPr/>
+        <p:nvPr/>
+      </p:nvGrpSpPr>
+      <p:grpSpPr/>
+      <p:sp>
+        <p:nvSpPr>
+          <p:cNvPr id="2" name="TextBox 1"/>
+          <p:cNvSpPr txBox="1"/>
+          <p:nvPr/>
+        </p:nvSpPr>
+        <p:spPr>
+          <a:xfrm>
+            <a:off x="457200" y="320040"/>
+            <a:ext cx="8229600" cy="822960"/>
+          </a:xfrm>
+          <a:prstGeom prst="rect">
+            <a:avLst/>
+          </a:prstGeom>
+          <a:noFill/>
+        </p:spPr>
+        <p:txBody>
+          <a:bodyPr wrap="square">
+            <a:spAutoFit/>
+          </a:bodyPr>
+          <a:lstStyle/>
+          <a:p>
+            <a:r>
+              <a:rPr sz="2600" b="1">
+                <a:solidFill>
+                  <a:srgbClr val="0B3D2E"/>
+                </a:solidFill>
+              </a:rPr>
+              <a:t>⚠️ Errores comunes</a:t>
+            </a:r>
+          </a:p>
+        </p:txBody>
+      </p:sp>
+      <p:sp>
+        <p:nvSpPr>
+          <p:cNvPr id="3" name="TextBox 2"/>
+          <p:cNvSpPr txBox="1"/>
+          <p:nvPr/>
+        </p:nvSpPr>
+        <p:spPr>
+          <a:xfrm>
+            <a:off x="457200" y="1280160"/>
+            <a:ext cx="8229600" cy="4937760"/>
+          </a:xfrm>
+          <a:prstGeom prst="rect">
+            <a:avLst/>
+          </a:prstGeom>
+          <a:noFill/>
+        </p:spPr>
+        <p:txBody>
+          <a:bodyPr wrap="square">
+            <a:spAutoFit/>
+          </a:bodyPr>
+          <a:lstStyle/>
+          <a:p>
+            <a:pPr>
+              <a:spcAft>
+                <a:spcPts val="600"/>
+              </a:spcAft>
+            </a:pPr>
+            <a:r>
+              <a:rPr sz="1500">
+                <a:solidFill>
+                  <a:srgbClr val="22282E"/>
+                </a:solidFill>
+              </a:rPr>
+              <a:t>•  El ejercicio se estanca — Faltan injects o facilitación. Prepara MSEL y lanza eventos a tiempo.</a:t>
+            </a:r>
+          </a:p>
+          <a:p>
+            <a:pPr>
+              <a:spcAft>
+                <a:spcPts val="600"/>
+              </a:spcAft>
+            </a:pPr>
+            <a:r>
+              <a:rPr sz="1500">
+                <a:solidFill>
+                  <a:srgbClr val="22282E"/>
+                </a:solidFill>
+              </a:rPr>
+              <a:t>•  Se convierte en clase teórica — El facilitador resuelve por el equipo. Deja que decidan ellos.</a:t>
+            </a:r>
+          </a:p>
+          <a:p>
+            <a:pPr>
+              <a:spcAft>
+                <a:spcPts val="600"/>
+              </a:spcAft>
+            </a:pPr>
+            <a:r>
+              <a:rPr sz="1500">
+                <a:solidFill>
+                  <a:srgbClr val="22282E"/>
+                </a:solidFill>
+              </a:rPr>
+              <a:t>•  Escenario irreal — No aplica al contexto. Diseña sobre amenazas plausibles para la organización.</a:t>
+            </a:r>
+          </a:p>
+          <a:p>
+            <a:pPr>
+              <a:spcAft>
+                <a:spcPts val="600"/>
+              </a:spcAft>
+            </a:pPr>
+            <a:r>
+              <a:rPr sz="1500">
+                <a:solidFill>
+                  <a:srgbClr val="22282E"/>
+                </a:solidFill>
+              </a:rPr>
+              <a:t>•  Sin conclusiones accionables — No hubo informe. Cierra con hotwash y acciones asignadas.</a:t>
+            </a:r>
+          </a:p>
+          <a:p>
+            <a:pPr>
+              <a:spcAft>
+                <a:spcPts val="600"/>
+              </a:spcAft>
+            </a:pPr>
+            <a:r>
+              <a:rPr sz="1500">
+                <a:solidFill>
+                  <a:srgbClr val="22282E"/>
+                </a:solidFill>
+              </a:rPr>
+              <a:t>•  Solo participa TI — Falta convocar a legal, comunicación y dirección. Inclúyelos.</a:t>
+            </a:r>
+          </a:p>
+        </p:txBody>
+      </p:sp>
+    </p:spTree>
+  </p:cSld>
+  <p:clrMapOvr>
+    <a:masterClrMapping/>
+  </p:clrMapOvr>
+</p:sld>
+</file>
+
+<file path=ppt/slides/slide15.xml><?xml version="1.0" encoding="utf-8"?>
+<p:sld xmlns:a="http://schemas.openxmlformats.org/drawingml/2006/main" xmlns:p="http://schemas.openxmlformats.org/presentationml/2006/main" xmlns:r="http://schemas.openxmlformats.org/officeDocument/2006/relationships">
+  <p:cSld>
+    <p:spTree>
+      <p:nvGrpSpPr>
+        <p:cNvPr id="1" name=""/>
+        <p:cNvGrpSpPr/>
+        <p:nvPr/>
+      </p:nvGrpSpPr>
+      <p:grpSpPr/>
+      <p:sp>
+        <p:nvSpPr>
+          <p:cNvPr id="2" name="TextBox 1"/>
+          <p:cNvSpPr txBox="1"/>
+          <p:nvPr/>
+        </p:nvSpPr>
+        <p:spPr>
+          <a:xfrm>
+            <a:off x="457200" y="320040"/>
+            <a:ext cx="8229600" cy="822960"/>
+          </a:xfrm>
+          <a:prstGeom prst="rect">
+            <a:avLst/>
+          </a:prstGeom>
+          <a:noFill/>
+        </p:spPr>
+        <p:txBody>
+          <a:bodyPr wrap="square">
+            <a:spAutoFit/>
+          </a:bodyPr>
+          <a:lstStyle/>
+          <a:p>
+            <a:r>
+              <a:rPr sz="2600" b="1">
+                <a:solidFill>
+                  <a:srgbClr val="0B3D2E"/>
+                </a:solidFill>
+              </a:rPr>
+              <a:t>❓ Preguntas frecuentes</a:t>
+            </a:r>
+          </a:p>
+        </p:txBody>
+      </p:sp>
+      <p:sp>
+        <p:nvSpPr>
+          <p:cNvPr id="3" name="TextBox 2"/>
+          <p:cNvSpPr txBox="1"/>
+          <p:nvPr/>
+        </p:nvSpPr>
+        <p:spPr>
+          <a:xfrm>
+            <a:off x="457200" y="1280160"/>
+            <a:ext cx="8229600" cy="4937760"/>
+          </a:xfrm>
+          <a:prstGeom prst="rect">
+            <a:avLst/>
+          </a:prstGeom>
+          <a:noFill/>
+        </p:spPr>
+        <p:txBody>
+          <a:bodyPr wrap="square">
+            <a:spAutoFit/>
+          </a:bodyPr>
+          <a:lstStyle/>
+          <a:p>
+            <a:pPr>
+              <a:spcAft>
+                <a:spcPts val="600"/>
+              </a:spcAft>
+            </a:pPr>
+            <a:r>
+              <a:rPr sz="1500">
+                <a:solidFill>
+                  <a:srgbClr val="22282E"/>
+                </a:solidFill>
+              </a:rPr>
+              <a:t>•  ❓ ¿Tabletop o simulacro real?</a:t>
+            </a:r>
+          </a:p>
+          <a:p>
+            <a:pPr>
+              <a:spcAft>
+                <a:spcPts val="600"/>
+              </a:spcAft>
+            </a:pPr>
+            <a:r>
+              <a:rPr sz="1500">
+                <a:solidFill>
+                  <a:srgbClr val="22282E"/>
+                </a:solidFill>
+              </a:rPr>
+              <a:t>•  Tabletop primero: barato, sin riesgo, ideal para validar procesos y roles. Los funcionales y full-scale se hacen cuando el proceso ya madura.</a:t>
+            </a:r>
+          </a:p>
+          <a:p>
+            <a:pPr>
+              <a:spcAft>
+                <a:spcPts val="600"/>
+              </a:spcAft>
+            </a:pPr>
+            <a:r>
+              <a:rPr sz="1500">
+                <a:solidFill>
+                  <a:srgbClr val="22282E"/>
+                </a:solidFill>
+              </a:rPr>
+              <a:t>•  ❓ ¿Con qué frecuencia se hacen?</a:t>
+            </a:r>
+          </a:p>
+          <a:p>
+            <a:pPr>
+              <a:spcAft>
+                <a:spcPts val="600"/>
+              </a:spcAft>
+            </a:pPr>
+            <a:r>
+              <a:rPr sz="1500">
+                <a:solidFill>
+                  <a:srgbClr val="22282E"/>
+                </a:solidFill>
+              </a:rPr>
+              <a:t>•  Al menos anual, y tras cambios grandes (nuevos sistemas, reorganización) o incidentes relevantes.</a:t>
+            </a:r>
+          </a:p>
+          <a:p>
+            <a:pPr>
+              <a:spcAft>
+                <a:spcPts val="600"/>
+              </a:spcAft>
+            </a:pPr>
+            <a:r>
+              <a:rPr sz="1500">
+                <a:solidFill>
+                  <a:srgbClr val="22282E"/>
+                </a:solidFill>
+              </a:rPr>
+              <a:t>•  ❓ ¿Quién debe participar?</a:t>
+            </a:r>
+          </a:p>
+          <a:p>
+            <a:pPr>
+              <a:spcAft>
+                <a:spcPts val="600"/>
+              </a:spcAft>
+            </a:pPr>
+            <a:r>
+              <a:rPr sz="1500">
+                <a:solidFill>
+                  <a:srgbClr val="22282E"/>
+                </a:solidFill>
+              </a:rPr>
+              <a:t>•  No solo TI/seguridad: incluye legal, comunicación, RR. HH. y dirección, según el escenario.</a:t>
+            </a:r>
+          </a:p>
+          <a:p>
+            <a:pPr>
+              <a:spcAft>
+                <a:spcPts val="600"/>
+              </a:spcAft>
+            </a:pPr>
+            <a:r>
+              <a:rPr sz="1500">
+                <a:solidFill>
+                  <a:srgbClr val="22282E"/>
+                </a:solidFill>
+              </a:rPr>
+              <a:t>•  ❓ ¿Qué es la MSEL?</a:t>
+            </a:r>
+          </a:p>
+        </p:txBody>
+      </p:sp>
+    </p:spTree>
+  </p:cSld>
+  <p:clrMapOvr>
+    <a:masterClrMapping/>
+  </p:clrMapOvr>
+</p:sld>
+</file>
+
+<file path=ppt/slides/slide16.xml><?xml version="1.0" encoding="utf-8"?>
+<p:sld xmlns:a="http://schemas.openxmlformats.org/drawingml/2006/main" xmlns:p="http://schemas.openxmlformats.org/presentationml/2006/main" xmlns:r="http://schemas.openxmlformats.org/officeDocument/2006/relationships">
+  <p:cSld>
+    <p:spTree>
+      <p:nvGrpSpPr>
+        <p:cNvPr id="1" name=""/>
+        <p:cNvGrpSpPr/>
+        <p:nvPr/>
+      </p:nvGrpSpPr>
+      <p:grpSpPr/>
+      <p:sp>
+        <p:nvSpPr>
+          <p:cNvPr id="2" name="TextBox 1"/>
+          <p:cNvSpPr txBox="1"/>
+          <p:nvPr/>
+        </p:nvSpPr>
+        <p:spPr>
+          <a:xfrm>
+            <a:off x="457200" y="320040"/>
+            <a:ext cx="8229600" cy="822960"/>
+          </a:xfrm>
+          <a:prstGeom prst="rect">
+            <a:avLst/>
+          </a:prstGeom>
+          <a:noFill/>
+        </p:spPr>
+        <p:txBody>
+          <a:bodyPr wrap="square">
+            <a:spAutoFit/>
+          </a:bodyPr>
+          <a:lstStyle/>
+          <a:p>
+            <a:r>
+              <a:rPr sz="2600" b="1">
+                <a:solidFill>
+                  <a:srgbClr val="0B3D2E"/>
+                </a:solidFill>
+              </a:rPr>
+              <a:t>🔗 Referencias verificables y alcance</a:t>
+            </a:r>
+          </a:p>
+        </p:txBody>
+      </p:sp>
+      <p:sp>
+        <p:nvSpPr>
+          <p:cNvPr id="3" name="TextBox 2"/>
+          <p:cNvSpPr txBox="1"/>
+          <p:nvPr/>
+        </p:nvSpPr>
+        <p:spPr>
+          <a:xfrm>
+            <a:off x="457200" y="1280160"/>
+            <a:ext cx="8229600" cy="4937760"/>
+          </a:xfrm>
+          <a:prstGeom prst="rect">
+            <a:avLst/>
+          </a:prstGeom>
+          <a:noFill/>
+        </p:spPr>
+        <p:txBody>
+          <a:bodyPr wrap="square">
+            <a:spAutoFit/>
+          </a:bodyPr>
+          <a:lstStyle/>
+          <a:p>
+            <a:pPr>
+              <a:spcAft>
+                <a:spcPts val="600"/>
+              </a:spcAft>
+            </a:pPr>
+            <a:r>
+              <a:rPr sz="1500">
+                <a:solidFill>
+                  <a:srgbClr val="22282E"/>
+                </a:solidFill>
+              </a:rPr>
+              <a:t>•  NIST SP 800-84: &lt;https://csrc.nist.gov/pubs/sp/800/84/final&gt; — guía oficial para programas de pruebas, capacitación y ejercicios; debe adaptarse al riesgo y objetivos de la organización.</a:t>
+            </a:r>
+          </a:p>
+          <a:p>
+            <a:pPr>
+              <a:spcAft>
+                <a:spcPts val="600"/>
+              </a:spcAft>
+            </a:pPr>
+            <a:r>
+              <a:rPr sz="1500">
+                <a:solidFill>
+                  <a:srgbClr val="22282E"/>
+                </a:solidFill>
+              </a:rPr>
+              <a:t>•  CISA Tabletop Exercise Package documents: &lt;https://www.cisa.gov/resources-tools/resources/ctep-package-documents&gt; — plantillas y paquetes oficiales para diseñar escenarios, MSEL y evaluación.</a:t>
+            </a:r>
+          </a:p>
+          <a:p>
+            <a:pPr>
+              <a:spcAft>
+                <a:spcPts val="600"/>
+              </a:spcAft>
+            </a:pPr>
+            <a:r>
+              <a:rPr sz="1500">
+                <a:solidFill>
+                  <a:srgbClr val="22282E"/>
+                </a:solidFill>
+              </a:rPr>
+              <a:t>•  NIST SP 800-61 Rev. 3: &lt;https://doi.org/10.6028/NIST.SP.800-61r3&gt; — integra aprendizaje y mejora de la capacidad de respuesta en el ciclo de gestión de riesgo.</a:t>
+            </a:r>
+          </a:p>
+          <a:p>
+            <a:pPr>
+              <a:spcAft>
+                <a:spcPts val="600"/>
+              </a:spcAft>
+            </a:pPr>
+            <a:r>
+              <a:rPr sz="1500">
+                <a:solidFill>
+                  <a:srgbClr val="22282E"/>
+                </a:solidFill>
+              </a:rPr>
+              <a:t>•  CISA Incident Response Playbook: &lt;https://www.cisa.gov/sites/default/files/publications/CybersecurityIncidentVulnerabilityResponsePlaybooks508C.pdf&gt; — material para convertir procedimientos en puntos…</a:t>
+            </a:r>
+          </a:p>
+        </p:txBody>
+      </p:sp>
+    </p:spTree>
+  </p:cSld>
+  <p:clrMapOvr>
+    <a:masterClrMapping/>
+  </p:clrMapOvr>
+</p:sld>
+</file>
+
+<file path=ppt/slides/slide17.xml><?xml version="1.0" encoding="utf-8"?>
+<p:sld xmlns:a="http://schemas.openxmlformats.org/drawingml/2006/main" xmlns:p="http://schemas.openxmlformats.org/presentationml/2006/main" xmlns:r="http://schemas.openxmlformats.org/officeDocument/2006/relationships">
+  <p:cSld>
+    <p:spTree>
+      <p:nvGrpSpPr>
+        <p:cNvPr id="1" name=""/>
+        <p:cNvGrpSpPr/>
+        <p:nvPr/>
+      </p:nvGrpSpPr>
+      <p:grpSpPr/>
+      <p:sp>
+        <p:nvSpPr>
+          <p:cNvPr id="2" name="TextBox 1"/>
+          <p:cNvSpPr txBox="1"/>
+          <p:nvPr/>
+        </p:nvSpPr>
+        <p:spPr>
+          <a:xfrm>
+            <a:off x="457200" y="274320"/>
+            <a:ext cx="8229600" cy="640080"/>
+          </a:xfrm>
+          <a:prstGeom prst="rect">
+            <a:avLst/>
+          </a:prstGeom>
+          <a:noFill/>
+        </p:spPr>
+        <p:txBody>
+          <a:bodyPr wrap="square">
+            <a:spAutoFit/>
+          </a:bodyPr>
+          <a:lstStyle/>
+          <a:p>
+            <a:r>
+              <a:rPr sz="2200" b="1">
+                <a:solidFill>
+                  <a:srgbClr val="0B3D2E"/>
+                </a:solidFill>
+              </a:rPr>
+              <a:t>Diagrama de la clase</a:t>
+            </a:r>
+          </a:p>
+        </p:txBody>
+      </p:sp>
+      <p:pic>
+        <p:nvPicPr>
+          <p:cNvPr id="3" name="Picture 2" descr="291f6c3884127162.png"/>
+          <p:cNvPicPr>
+            <a:picLocks noChangeAspect="1"/>
+          </p:cNvPicPr>
+          <p:nvPr/>
+        </p:nvPicPr>
+        <p:blipFill>
+          <a:blip r:embed="rId2"/>
+          <a:stretch>
+            <a:fillRect/>
+          </a:stretch>
+        </p:blipFill>
+        <p:spPr>
+          <a:xfrm>
+            <a:off x="457200" y="3561588"/>
+            <a:ext cx="8229600" cy="374904"/>
+          </a:xfrm>
+          <a:prstGeom prst="rect">
+            <a:avLst/>
+          </a:prstGeom>
+        </p:spPr>
+      </p:pic>
     </p:spTree>
   </p:cSld>
   <p:clrMapOvr>
@@ -3698,7 +4359,7 @@
                   <a:srgbClr val="22282E"/>
                 </a:solidFill>
               </a:rPr>
-              <a:t>•  Aprender a diseñar y facilitar ejercicios de mesa (tabletop): simulacros discutidos donde el equipo ensaya su respuesta a un incidente sin sistemas reales en riesgo. Al terminar sabrás construir un escenario con inyecciones, facilitar la discusión, evaluar la respuesta y capturar mejoras.</a:t>
+              <a:t>•  Aprender a diseñar y facilitar ejercicios de mesa (tabletop): simulacros discutidos donde el equipo ensaya su respuesta a un incidente sin sistemas reales en riesgo. Al terminar sabrás construir un…</a:t>
             </a:r>
           </a:p>
         </p:txBody>
@@ -4092,7 +4753,7 @@
                   <a:srgbClr val="0B3D2E"/>
                 </a:solidFill>
               </a:rPr>
-              <a:t>📖 Definiciones y características</a:t>
+              <a:t>🧠 Explicación en profundidad</a:t>
             </a:r>
           </a:p>
         </p:txBody>
@@ -4130,97 +4791,97 @@
                   <a:srgbClr val="22282E"/>
                 </a:solidFill>
               </a:rPr>
-              <a:t>•  Tabletop: ejercicio de discusión sin sistemas reales. Característica: bajo costo y riesgo, alto valor para procesos y roles.</a:t>
-            </a:r>
-          </a:p>
-          <a:p>
-            <a:pPr>
-              <a:spcAft>
-                <a:spcPts val="600"/>
-              </a:spcAft>
-            </a:pPr>
-            <a:r>
-              <a:rPr sz="1500">
-                <a:solidFill>
-                  <a:srgbClr val="22282E"/>
-                </a:solidFill>
-              </a:rPr>
-              <a:t>•  Ejercicio funcional: prueba parcial con sistemas/herramientas reales. Característica: más realista, más costoso.</a:t>
-            </a:r>
-          </a:p>
-          <a:p>
-            <a:pPr>
-              <a:spcAft>
-                <a:spcPts val="600"/>
-              </a:spcAft>
-            </a:pPr>
-            <a:r>
-              <a:rPr sz="1500">
-                <a:solidFill>
-                  <a:srgbClr val="22282E"/>
-                </a:solidFill>
-              </a:rPr>
-              <a:t>•  Simulacro completo (full-scale): respuesta real end-to-end. Característica: máximo realismo y coste.</a:t>
-            </a:r>
-          </a:p>
-          <a:p>
-            <a:pPr>
-              <a:spcAft>
-                <a:spcPts val="600"/>
-              </a:spcAft>
-            </a:pPr>
-            <a:r>
-              <a:rPr sz="1500">
-                <a:solidFill>
-                  <a:srgbClr val="22282E"/>
-                </a:solidFill>
-              </a:rPr>
-              <a:t>•  Inject (inyección): nueva información introducida por el facilitador para escalar el escenario. Característica: obliga a decidir.</a:t>
-            </a:r>
-          </a:p>
-          <a:p>
-            <a:pPr>
-              <a:spcAft>
-                <a:spcPts val="600"/>
-              </a:spcAft>
-            </a:pPr>
-            <a:r>
-              <a:rPr sz="1500">
-                <a:solidFill>
-                  <a:srgbClr val="22282E"/>
-                </a:solidFill>
-              </a:rPr>
-              <a:t>•  Facilitador: guía la sesión, lanza injects, evita que se estanque. Característica: neutral, no resuelve por el equipo.</a:t>
-            </a:r>
-          </a:p>
-          <a:p>
-            <a:pPr>
-              <a:spcAft>
-                <a:spcPts val="600"/>
-              </a:spcAft>
-            </a:pPr>
-            <a:r>
-              <a:rPr sz="1500">
-                <a:solidFill>
-                  <a:srgbClr val="22282E"/>
-                </a:solidFill>
-              </a:rPr>
-              <a:t>•  MSEL (Master Scenario Events List): guion de eventos e injects planificados. Característica: estructura el ejercicio.</a:t>
-            </a:r>
-          </a:p>
-          <a:p>
-            <a:pPr>
-              <a:spcAft>
-                <a:spcPts val="600"/>
-              </a:spcAft>
-            </a:pPr>
-            <a:r>
-              <a:rPr sz="1500">
-                <a:solidFill>
-                  <a:srgbClr val="22282E"/>
-                </a:solidFill>
-              </a:rPr>
-              <a:t>•  Hotwash: debrief inmediato tras el ejercicio. Característica: captura impresiones en caliente.</a:t>
+              <a:t>•  Un tabletop es una conversación facilitada para evaluar decisiones, dependencias y autoridad frente a un escenario; no mide la capacidad técnica por sí solo. Los objetivos deben ser observables…</a:t>
+            </a:r>
+          </a:p>
+          <a:p>
+            <a:pPr>
+              <a:spcAft>
+                <a:spcPts val="600"/>
+              </a:spcAft>
+            </a:pPr>
+            <a:r>
+              <a:rPr sz="1500">
+                <a:solidFill>
+                  <a:srgbClr val="22282E"/>
+                </a:solidFill>
+              </a:rPr>
+              <a:t>•  Los injects introducen evidencia o restricciones, no trucos. El facilitador separa evaluación de enseñanza y crea seguridad psicológica para exponer vacíos. Se registran decisiones, supuestos y…</a:t>
+            </a:r>
+          </a:p>
+          <a:p>
+            <a:pPr>
+              <a:spcAft>
+                <a:spcPts val="600"/>
+              </a:spcAft>
+            </a:pPr>
+            <a:r>
+              <a:rPr sz="1500">
+                <a:solidFill>
+                  <a:srgbClr val="22282E"/>
+                </a:solidFill>
+              </a:rPr>
+              <a:t>•  «Probar respuesta a ransomware» es demasiado amplio. Un objetivo observable puede ser que operaciones y negocio decidan en quince minutos si aislar un servidor crítico, usando criterios del playbook…</a:t>
+            </a:r>
+          </a:p>
+          <a:p>
+            <a:pPr>
+              <a:spcAft>
+                <a:spcPts val="600"/>
+              </a:spcAft>
+            </a:pPr>
+            <a:r>
+              <a:rPr sz="1500">
+                <a:solidFill>
+                  <a:srgbClr val="22282E"/>
+                </a:solidFill>
+              </a:rPr>
+              <a:t>•  El escenario describe contexto suficiente y deja incertidumbre. Debe ser plausible para arquitectura, datos y amenazas de la organización, pero no necesita copiar un incidente real. Se establecen…</a:t>
+            </a:r>
+          </a:p>
+          <a:p>
+            <a:pPr>
+              <a:spcAft>
+                <a:spcPts val="600"/>
+              </a:spcAft>
+            </a:pPr>
+            <a:r>
+              <a:rPr sz="1500">
+                <a:solidFill>
+                  <a:srgbClr val="22282E"/>
+                </a:solidFill>
+              </a:rPr>
+              <a:t>•  La MSEL ordena hora, inject, canal, destinatario, respuesta esperada, objetivo evaluado y contingencia. Un inject útil aporta nueva evidencia: el EDR pierde conectividad, un cliente publica datos o…</a:t>
+            </a:r>
+          </a:p>
+          <a:p>
+            <a:pPr>
+              <a:spcAft>
+                <a:spcPts val="600"/>
+              </a:spcAft>
+            </a:pPr>
+            <a:r>
+              <a:rPr sz="1500">
+                <a:solidFill>
+                  <a:srgbClr val="22282E"/>
+                </a:solidFill>
+              </a:rPr>
+              <a:t>•  El facilitador pregunta qué haría el equipo, quién lo autoriza, con qué información y qué registraría. Si entrega la solución, convierte el ejercicio en clase. Si el grupo se estanca, puede recordar…</a:t>
+            </a:r>
+          </a:p>
+          <a:p>
+            <a:pPr>
+              <a:spcAft>
+                <a:spcPts val="600"/>
+              </a:spcAft>
+            </a:pPr>
+            <a:r>
+              <a:rPr sz="1500">
+                <a:solidFill>
+                  <a:srgbClr val="22282E"/>
+                </a:solidFill>
+              </a:rPr>
+              <a:t>•  Se capturan decisiones, tiempo, evidencia solicitada, comunicaciones, supuestos y dependencias. Una puntuación puede ayudar, pero no demuestra «madurez» completa: el desempeño depende del alcance y…</a:t>
             </a:r>
           </a:p>
         </p:txBody>
@@ -4271,7 +4932,7 @@
                   <a:srgbClr val="0B3D2E"/>
                 </a:solidFill>
               </a:rPr>
-              <a:t>🧰 Herramientas y preparación</a:t>
+              <a:t>📔 Glosario</a:t>
             </a:r>
           </a:p>
         </p:txBody>
@@ -4309,52 +4970,97 @@
                   <a:srgbClr val="22282E"/>
                 </a:solidFill>
               </a:rPr>
-              <a:t>•  Diseño: plantilla de escenario, MSEL con injects y tiempos, objetivos medibles.</a:t>
-            </a:r>
-          </a:p>
-          <a:p>
-            <a:pPr>
-              <a:spcAft>
-                <a:spcPts val="600"/>
-              </a:spcAft>
-            </a:pPr>
-            <a:r>
-              <a:rPr sz="1500">
-                <a:solidFill>
-                  <a:srgbClr val="22282E"/>
-                </a:solidFill>
-              </a:rPr>
-              <a:t>•  Facilitación: sala (física o virtual), reloj, y un observador que tome notas.</a:t>
-            </a:r>
-          </a:p>
-          <a:p>
-            <a:pPr>
-              <a:spcAft>
-                <a:spcPts val="600"/>
-              </a:spcAft>
-            </a:pPr>
-            <a:r>
-              <a:rPr sz="1500">
-                <a:solidFill>
-                  <a:srgbClr val="22282E"/>
-                </a:solidFill>
-              </a:rPr>
-              <a:t>•  Insumos: los playbooks (clase 215) que se quieren poner a prueba.</a:t>
-            </a:r>
-          </a:p>
-          <a:p>
-            <a:pPr>
-              <a:spcAft>
-                <a:spcPts val="600"/>
-              </a:spcAft>
-            </a:pPr>
-            <a:r>
-              <a:rPr sz="1500">
-                <a:solidFill>
-                  <a:srgbClr val="22282E"/>
-                </a:solidFill>
-              </a:rPr>
-              <a:t>•  Ejercicio aplicado: no requiere entorno técnico; es organizativo.</a:t>
+              <a:t>•  Tabletop exercise: simulación conversacional de decisiones.</a:t>
+            </a:r>
+          </a:p>
+          <a:p>
+            <a:pPr>
+              <a:spcAft>
+                <a:spcPts val="600"/>
+              </a:spcAft>
+            </a:pPr>
+            <a:r>
+              <a:rPr sz="1500">
+                <a:solidFill>
+                  <a:srgbClr val="22282E"/>
+                </a:solidFill>
+              </a:rPr>
+              <a:t>•  Inject: información añadida durante el escenario.</a:t>
+            </a:r>
+          </a:p>
+          <a:p>
+            <a:pPr>
+              <a:spcAft>
+                <a:spcPts val="600"/>
+              </a:spcAft>
+            </a:pPr>
+            <a:r>
+              <a:rPr sz="1500">
+                <a:solidFill>
+                  <a:srgbClr val="22282E"/>
+                </a:solidFill>
+              </a:rPr>
+              <a:t>•  Facilitador: persona que guía sin decidir por participantes.</a:t>
+            </a:r>
+          </a:p>
+          <a:p>
+            <a:pPr>
+              <a:spcAft>
+                <a:spcPts val="600"/>
+              </a:spcAft>
+            </a:pPr>
+            <a:r>
+              <a:rPr sz="1500">
+                <a:solidFill>
+                  <a:srgbClr val="22282E"/>
+                </a:solidFill>
+              </a:rPr>
+              <a:t>•  Controller: administra ritmo y reglas del ejercicio.</a:t>
+            </a:r>
+          </a:p>
+          <a:p>
+            <a:pPr>
+              <a:spcAft>
+                <a:spcPts val="600"/>
+              </a:spcAft>
+            </a:pPr>
+            <a:r>
+              <a:rPr sz="1500">
+                <a:solidFill>
+                  <a:srgbClr val="22282E"/>
+                </a:solidFill>
+              </a:rPr>
+              <a:t>•  Observer: registra evidencia sin intervenir.</a:t>
+            </a:r>
+          </a:p>
+          <a:p>
+            <a:pPr>
+              <a:spcAft>
+                <a:spcPts val="600"/>
+              </a:spcAft>
+            </a:pPr>
+            <a:r>
+              <a:rPr sz="1500">
+                <a:solidFill>
+                  <a:srgbClr val="22282E"/>
+                </a:solidFill>
+              </a:rPr>
+              <a:t>•  Hotwash: debrief inmediato.</a:t>
+            </a:r>
+          </a:p>
+          <a:p>
+            <a:pPr>
+              <a:spcAft>
+                <a:spcPts val="600"/>
+              </a:spcAft>
+            </a:pPr>
+            <a:r>
+              <a:rPr sz="1500">
+                <a:solidFill>
+                  <a:srgbClr val="22282E"/>
+                </a:solidFill>
+              </a:rPr>
+              <a:t>•  After-action report: resultados y plan de mejora.</a:t>
             </a:r>
           </a:p>
         </p:txBody>
@@ -4405,7 +5111,7 @@
                   <a:srgbClr val="0B3D2E"/>
                 </a:solidFill>
               </a:rPr>
-              <a:t>🧪 Laboratorio guiado</a:t>
+              <a:t>📖 Definiciones y características</a:t>
             </a:r>
           </a:p>
         </p:txBody>
@@ -4443,97 +5149,97 @@
                   <a:srgbClr val="22282E"/>
                 </a:solidFill>
               </a:rPr>
-              <a:t>•  Define objetivos medibles: p. ej. "validar el playbook de ransomware y los criterios de escalado".</a:t>
-            </a:r>
-          </a:p>
-          <a:p>
-            <a:pPr>
-              <a:spcAft>
-                <a:spcPts val="600"/>
-              </a:spcAft>
-            </a:pPr>
-            <a:r>
-              <a:rPr sz="1500">
-                <a:solidFill>
-                  <a:srgbClr val="22282E"/>
-                </a:solidFill>
-              </a:rPr>
-              <a:t>•  Elige un escenario realista para tu contexto (ransomware que cifra un servidor de archivos y exige rescate).</a:t>
-            </a:r>
-          </a:p>
-          <a:p>
-            <a:pPr>
-              <a:spcAft>
-                <a:spcPts val="600"/>
-              </a:spcAft>
-            </a:pPr>
-            <a:r>
-              <a:rPr sz="1500">
-                <a:solidFill>
-                  <a:srgbClr val="22282E"/>
-                </a:solidFill>
-              </a:rPr>
-              <a:t>•  Redacta la MSEL con injects progresivos y sus tiempos. Ejemplo de injects:</a:t>
-            </a:r>
-          </a:p>
-          <a:p>
-            <a:pPr>
-              <a:spcAft>
-                <a:spcPts val="600"/>
-              </a:spcAft>
-            </a:pPr>
-            <a:r>
-              <a:rPr sz="1500">
-                <a:solidFill>
-                  <a:srgbClr val="22282E"/>
-                </a:solidFill>
-              </a:rPr>
-              <a:t>•  T+0: el EDR alerta de cifrado masivo en un servidor.</a:t>
-            </a:r>
-          </a:p>
-          <a:p>
-            <a:pPr>
-              <a:spcAft>
-                <a:spcPts val="600"/>
-              </a:spcAft>
-            </a:pPr>
-            <a:r>
-              <a:rPr sz="1500">
-                <a:solidFill>
-                  <a:srgbClr val="22282E"/>
-                </a:solidFill>
-              </a:rPr>
-              <a:t>•  T+15: usuarios reportan que no acceden a archivos.</a:t>
-            </a:r>
-          </a:p>
-          <a:p>
-            <a:pPr>
-              <a:spcAft>
-                <a:spcPts val="600"/>
-              </a:spcAft>
-            </a:pPr>
-            <a:r>
-              <a:rPr sz="1500">
-                <a:solidFill>
-                  <a:srgbClr val="22282E"/>
-                </a:solidFill>
-              </a:rPr>
-              <a:t>•  T+30: aparece una nota de rescate; el atacante amenaza con filtrar datos.</a:t>
-            </a:r>
-          </a:p>
-          <a:p>
-            <a:pPr>
-              <a:spcAft>
-                <a:spcPts val="600"/>
-              </a:spcAft>
-            </a:pPr>
-            <a:r>
-              <a:rPr sz="1500">
-                <a:solidFill>
-                  <a:srgbClr val="22282E"/>
-                </a:solidFill>
-              </a:rPr>
-              <a:t>•  T+45: un periodista contacta pidiendo comentarios.</a:t>
+              <a:t>•  Tabletop: ejercicio basado en discusión y escenario. Característica: evalúa decisiones, roles y coordinación dentro de su alcance, no ejecución técnica completa.</a:t>
+            </a:r>
+          </a:p>
+          <a:p>
+            <a:pPr>
+              <a:spcAft>
+                <a:spcPts val="600"/>
+              </a:spcAft>
+            </a:pPr>
+            <a:r>
+              <a:rPr sz="1500">
+                <a:solidFill>
+                  <a:srgbClr val="22282E"/>
+                </a:solidFill>
+              </a:rPr>
+              <a:t>•  Ejercicio funcional: prueba parcial con sistemas/herramientas reales. Característica: más realista, más costoso.</a:t>
+            </a:r>
+          </a:p>
+          <a:p>
+            <a:pPr>
+              <a:spcAft>
+                <a:spcPts val="600"/>
+              </a:spcAft>
+            </a:pPr>
+            <a:r>
+              <a:rPr sz="1500">
+                <a:solidFill>
+                  <a:srgbClr val="22282E"/>
+                </a:solidFill>
+              </a:rPr>
+              <a:t>•  Simulacro completo (full-scale): ejercicio amplio con operaciones coordinadas y recursos reales o representativos. Característica: ofrece mayor realismo, complejidad, costo y riesgo controlado.</a:t>
+            </a:r>
+          </a:p>
+          <a:p>
+            <a:pPr>
+              <a:spcAft>
+                <a:spcPts val="600"/>
+              </a:spcAft>
+            </a:pPr>
+            <a:r>
+              <a:rPr sz="1500">
+                <a:solidFill>
+                  <a:srgbClr val="22282E"/>
+                </a:solidFill>
+              </a:rPr>
+              <a:t>•  Inject (inyección): nueva información introducida por el facilitador para escalar el escenario. Característica: obliga a decidir.</a:t>
+            </a:r>
+          </a:p>
+          <a:p>
+            <a:pPr>
+              <a:spcAft>
+                <a:spcPts val="600"/>
+              </a:spcAft>
+            </a:pPr>
+            <a:r>
+              <a:rPr sz="1500">
+                <a:solidFill>
+                  <a:srgbClr val="22282E"/>
+                </a:solidFill>
+              </a:rPr>
+              <a:t>•  Facilitador: guía la sesión, lanza injects, evita que se estanque. Característica: neutral, no resuelve por el equipo.</a:t>
+            </a:r>
+          </a:p>
+          <a:p>
+            <a:pPr>
+              <a:spcAft>
+                <a:spcPts val="600"/>
+              </a:spcAft>
+            </a:pPr>
+            <a:r>
+              <a:rPr sz="1500">
+                <a:solidFill>
+                  <a:srgbClr val="22282E"/>
+                </a:solidFill>
+              </a:rPr>
+              <a:t>•  MSEL (Master Scenario Events List): guion de eventos e injects planificados. Característica: estructura el ejercicio.</a:t>
+            </a:r>
+          </a:p>
+          <a:p>
+            <a:pPr>
+              <a:spcAft>
+                <a:spcPts val="600"/>
+              </a:spcAft>
+            </a:pPr>
+            <a:r>
+              <a:rPr sz="1500">
+                <a:solidFill>
+                  <a:srgbClr val="22282E"/>
+                </a:solidFill>
+              </a:rPr>
+              <a:t>•  Hotwash: debrief inmediato tras el ejercicio. Característica: captura impresiones en caliente.</a:t>
             </a:r>
           </a:p>
         </p:txBody>
@@ -4584,7 +5290,7 @@
                   <a:srgbClr val="0B3D2E"/>
                 </a:solidFill>
               </a:rPr>
-              <a:t>✍️ Ejercicios</a:t>
+              <a:t>🔍 Caso razonado — ransomware con presión pública y continuidad</a:t>
             </a:r>
           </a:p>
         </p:txBody>
@@ -4622,82 +5328,22 @@
                   <a:srgbClr val="22282E"/>
                 </a:solidFill>
               </a:rPr>
-              <a:t>•  Define tres objetivos medibles para un tabletop.</a:t>
-            </a:r>
-          </a:p>
-          <a:p>
-            <a:pPr>
-              <a:spcAft>
-                <a:spcPts val="600"/>
-              </a:spcAft>
-            </a:pPr>
-            <a:r>
-              <a:rPr sz="1500">
-                <a:solidFill>
-                  <a:srgbClr val="22282E"/>
-                </a:solidFill>
-              </a:rPr>
-              <a:t>•  Escribe una MSEL con cinco injects y sus tiempos.</a:t>
-            </a:r>
-          </a:p>
-          <a:p>
-            <a:pPr>
-              <a:spcAft>
-                <a:spcPts val="600"/>
-              </a:spcAft>
-            </a:pPr>
-            <a:r>
-              <a:rPr sz="1500">
-                <a:solidFill>
-                  <a:srgbClr val="22282E"/>
-                </a:solidFill>
-              </a:rPr>
-              <a:t>•  Diseña un escenario de brecha de datos con inject de prensa.</a:t>
-            </a:r>
-          </a:p>
-          <a:p>
-            <a:pPr>
-              <a:spcAft>
-                <a:spcPts val="600"/>
-              </a:spcAft>
-            </a:pPr>
-            <a:r>
-              <a:rPr sz="1500">
-                <a:solidFill>
-                  <a:srgbClr val="22282E"/>
-                </a:solidFill>
-              </a:rPr>
-              <a:t>•  Redacta las preguntas de decisión para dirección y legal.</a:t>
-            </a:r>
-          </a:p>
-          <a:p>
-            <a:pPr>
-              <a:spcAft>
-                <a:spcPts val="600"/>
-              </a:spcAft>
-            </a:pPr>
-            <a:r>
-              <a:rPr sz="1500">
-                <a:solidFill>
-                  <a:srgbClr val="22282E"/>
-                </a:solidFill>
-              </a:rPr>
-              <a:t>•  Crea una rúbrica para evaluar la respuesta del equipo.</a:t>
-            </a:r>
-          </a:p>
-          <a:p>
-            <a:pPr>
-              <a:spcAft>
-                <a:spcPts val="600"/>
-              </a:spcAft>
-            </a:pPr>
-            <a:r>
-              <a:rPr sz="1500">
-                <a:solidFill>
-                  <a:srgbClr val="22282E"/>
-                </a:solidFill>
-              </a:rPr>
-              <a:t>•  Escribe el guion de un hotwash de 15 minutos.</a:t>
+              <a:t>•  El ejercicio inicia con cifrado aparente en un servidor de archivos. El primer inject pide decidir aislamiento; el segundo informa que el sistema soporta despacho y que el procedimiento de…</a:t>
+            </a:r>
+          </a:p>
+          <a:p>
+            <a:pPr>
+              <a:spcAft>
+                <a:spcPts val="600"/>
+              </a:spcAft>
+            </a:pPr>
+            <a:r>
+              <a:rPr sz="1500">
+                <a:solidFill>
+                  <a:srgbClr val="22282E"/>
+                </a:solidFill>
+              </a:rPr>
+              <a:t>•  El facilitador no confirma si la filtración es real: pide qué evidencia solicitar, quién decide y cómo comunicar incertidumbre. La evaluación observa autoridad, tiempos, uso del playbook y…</a:t>
             </a:r>
           </a:p>
         </p:txBody>
@@ -4748,7 +5394,7 @@
                   <a:srgbClr val="0B3D2E"/>
                 </a:solidFill>
               </a:rPr>
-              <a:t>📝 Reto verificable</a:t>
+              <a:t>✅ Criterio de dominio</a:t>
             </a:r>
           </a:p>
         </p:txBody>
@@ -4786,22 +5432,7 @@
                   <a:srgbClr val="22282E"/>
                 </a:solidFill>
               </a:rPr>
-              <a:t>•  Diseña un ejercicio tabletop completo (objetivos, escenario, MSEL con al menos cinco injects, roles y rúbrica de evaluación) sobre un incidente relevante, listo para ejecutarse con un equipo real.</a:t>
-            </a:r>
-          </a:p>
-          <a:p>
-            <a:pPr>
-              <a:spcAft>
-                <a:spcPts val="600"/>
-              </a:spcAft>
-            </a:pPr>
-            <a:r>
-              <a:rPr sz="1500">
-                <a:solidFill>
-                  <a:srgbClr val="22282E"/>
-                </a:solidFill>
-              </a:rPr>
-              <a:t>•  Criterio de aceptación: el paquete permite a otro facilitador correr el ejercicio sin ayuda; incluye objetivos medibles, MSEL cronometrada con cinco injects, roles claros, puntos de decisión y una rúbrica para evaluar la respuesta.</a:t>
+              <a:t>•  Dominas la clase cuando cada objetivo es observable, la MSEL vincula injects con decisiones, los participantes tienen una función, el facilitador registra sin resolver y el AAR convierte brechas en…</a:t>
             </a:r>
           </a:p>
         </p:txBody>
